--- a/Sabado-20/S02_Sabado-20_3_Reel_Papas-que-resuelven_9x16.pptx
+++ b/Sabado-20/S02_Sabado-20_3_Reel_Papas-que-resuelven_9x16.pptx
@@ -3334,7 +3334,7 @@
       <p:grpSpPr/>
       <p:pic>
         <p:nvPicPr>
-          <p:cNvPr id="2" name="Picture 1" descr="firma.png"/>
+          <p:cNvPr id="2" name="Picture 1" descr="reloj.png"/>
           <p:cNvPicPr>
             <a:picLocks noChangeAspect="1"/>
           </p:cNvPicPr>
@@ -3410,7 +3410,7 @@
         </p:nvSpPr>
         <p:spPr>
           <a:xfrm>
-            <a:off x="777240" y="2694686"/>
+            <a:off x="777240" y="1964436"/>
             <a:ext cx="1371600" cy="146304"/>
           </a:xfrm>
           <a:prstGeom prst="rect">
@@ -3454,8 +3454,8 @@
         </p:nvSpPr>
         <p:spPr>
           <a:xfrm>
-            <a:off x="777240" y="3151886"/>
-            <a:ext cx="6675120" cy="7595108"/>
+            <a:off x="777240" y="2421636"/>
+            <a:ext cx="6675120" cy="9055608"/>
           </a:xfrm>
           <a:prstGeom prst="rect">
             <a:avLst/>
@@ -3480,7 +3480,7 @@
                 </a:solidFill>
                 <a:latin typeface="Inter"/>
               </a:rPr>
-              <a:t>Pronto, resolver será más fácil.</a:t>
+              <a:t>Ahora resolver lo legal es más fácil.</a:t>
             </a:r>
           </a:p>
         </p:txBody>
@@ -3645,7 +3645,7 @@
         </p:nvSpPr>
         <p:spPr>
           <a:xfrm>
-            <a:off x="777240" y="4155186"/>
+            <a:off x="777240" y="4282186"/>
             <a:ext cx="1371600" cy="146304"/>
           </a:xfrm>
           <a:prstGeom prst="rect">
@@ -3689,8 +3689,8 @@
         </p:nvSpPr>
         <p:spPr>
           <a:xfrm>
-            <a:off x="777240" y="4612386"/>
-            <a:ext cx="6675120" cy="4674108"/>
+            <a:off x="777240" y="4739386"/>
+            <a:ext cx="6675120" cy="4420108"/>
           </a:xfrm>
           <a:prstGeom prst="rect">
             <a:avLst/>
@@ -3709,13 +3709,13 @@
               </a:lnSpc>
             </a:pPr>
             <a:r>
-              <a:rPr sz="9200" b="1">
+              <a:rPr sz="6500" b="1">
                 <a:solidFill>
                   <a:srgbClr val="FFFFFF"/>
                 </a:solidFill>
                 <a:latin typeface="Inter"/>
               </a:rPr>
-              <a:t>Etiqueta a uno.</a:t>
+              <a:t>Etiqueta a uno. notaly.com.ve</a:t>
             </a:r>
           </a:p>
         </p:txBody>
